--- a/docs/figures/C_form_migration_report.pptx
+++ b/docs/figures/C_form_migration_report.pptx
@@ -3165,7 +3165,7 @@
           <a:p>
             <a:r>
               <a:rPr sz="2200"/>
-              <a:t>Coverage: 194 cells, 14 experiments, 13 models.</a:t>
+              <a:t>Coverage: 207 cells, 14 experiments, 14 models.</a:t>
             </a:r>
           </a:p>
         </p:txBody>
@@ -4794,7 +4794,7 @@
                     <a:lstStyle/>
                     <a:p>
                       <a:r>
-                        <a:t>13</a:t>
+                        <a:t>14</a:t>
                       </a:r>
                     </a:p>
                   </a:txBody>
